--- a/part2-豐兆/20260819仰望研習主講_從零打造社團管理系統_游豐兆05.pptx
+++ b/part2-豐兆/20260819仰望研習主講_從零打造社團管理系統_游豐兆05.pptx
@@ -2810,7 +2810,7 @@
           </a:p>
           <a:p>
             <a:r>
-              <a:t>今天大家覺得自己是新手，跟大家報一個數字：一一五學年度這個科學社團計畫，全台一共十八所學校參與——花蓮八所、中彰投十所。</a:t>
+              <a:t>今天大家覺得自己是新手，跟大家報一個數字：一一五學年度這個科學社團計畫，全台一共十九所學校參與——花蓮九所、中彰投十所。</a:t>
             </a:r>
           </a:p>
           <a:p>
